--- a/curriculum/M01/W11/L03/slides.pptx
+++ b/curriculum/M01/W11/L03/slides.pptx
@@ -14681,7 +14681,7 @@
                 <a:ea typeface="Malgun Gothic"/>
                 <a:cs typeface="Malgun Gothic"/>
               </a:rPr>
-              <a:t>M01-W03-L01 발생: 수정에서 기관 형성까지 — 체축 형성과 기관의 유래</a:t>
+              <a:t>M01-W03-L01 발생 요약: 수정·배엽·기관 형성 — 체축 형성과 기관의 유래</a:t>
             </a:r>
           </a:p>
         </p:txBody>
